--- a/刘志彪_产业经济学_第06章_非价格行为广告(市场势力主线精编).pptx
+++ b/刘志彪_产业经济学_第06章_非价格行为广告(市场势力主线精编).pptx
@@ -9268,22 +9268,7 @@
               </a:spcAft>
             </a:pPr>
             <a:r>
-              <a:rPr b="1" sz="1250">
-                <a:solidFill>
-                  <a:srgbClr val="1E293B"/>
-                </a:solidFill>
-                <a:latin typeface="微软雅黑"/>
-              </a:rPr>
-              <a:t>目标函数：</a:t>
-            </a:r>
-            <a:r>
-              <a:rPr sz="1250">
-                <a:solidFill>
-                  <a:srgbClr val="1E293B"/>
-                </a:solidFill>
-                <a:latin typeface="宋体"/>
-              </a:rPr>
-              <a:t>max_{P, A} pi = P * Q(P, A) - C(Q) - A。</a:t>
+              <a:t>目标函数：max(P, A) pi = P * Q(P, A) - C(Q) - A。</a:t>
             </a:r>
           </a:p>
           <a:p>
